--- a/lectures/Lecture_09/slides/Lecture_09_Serving_Deep_Learning_Models_with_FastAPI.pptx
+++ b/lectures/Lecture_09/slides/Lecture_09_Serving_Deep_Learning_Models_with_FastAPI.pptx
@@ -7841,8 +7841,8 @@
         </p:nvSpPr>
         <p:spPr>
           <a:xfrm>
-            <a:off x="658368" y="1883664"/>
-            <a:ext cx="146304" cy="146304"/>
+            <a:off x="658368" y="1837944"/>
+            <a:ext cx="128016" cy="128016"/>
           </a:xfrm>
           <a:prstGeom prst="rect">
             <a:avLst/>
@@ -7885,8 +7885,8 @@
         </p:nvSpPr>
         <p:spPr>
           <a:xfrm>
-            <a:off x="1042416" y="1700784"/>
-            <a:ext cx="10490911" cy="640080"/>
+            <a:off x="1024128" y="1691640"/>
+            <a:ext cx="10509199" cy="621792"/>
           </a:xfrm>
           <a:prstGeom prst="rect">
             <a:avLst/>
@@ -7927,8 +7927,8 @@
         </p:nvSpPr>
         <p:spPr>
           <a:xfrm>
-            <a:off x="658368" y="2596896"/>
-            <a:ext cx="146304" cy="146304"/>
+            <a:off x="658368" y="2514600"/>
+            <a:ext cx="128016" cy="128016"/>
           </a:xfrm>
           <a:prstGeom prst="rect">
             <a:avLst/>
@@ -7971,8 +7971,8 @@
         </p:nvSpPr>
         <p:spPr>
           <a:xfrm>
-            <a:off x="1042416" y="2414016"/>
-            <a:ext cx="10490911" cy="640080"/>
+            <a:off x="1024128" y="2368296"/>
+            <a:ext cx="10509199" cy="621792"/>
           </a:xfrm>
           <a:prstGeom prst="rect">
             <a:avLst/>
@@ -8013,8 +8013,8 @@
         </p:nvSpPr>
         <p:spPr>
           <a:xfrm>
-            <a:off x="658368" y="3310128"/>
-            <a:ext cx="146304" cy="146304"/>
+            <a:off x="658368" y="3191256"/>
+            <a:ext cx="128016" cy="128016"/>
           </a:xfrm>
           <a:prstGeom prst="rect">
             <a:avLst/>
@@ -8057,8 +8057,8 @@
         </p:nvSpPr>
         <p:spPr>
           <a:xfrm>
-            <a:off x="1042416" y="3127248"/>
-            <a:ext cx="10490911" cy="640080"/>
+            <a:off x="1024128" y="3044952"/>
+            <a:ext cx="10509199" cy="621792"/>
           </a:xfrm>
           <a:prstGeom prst="rect">
             <a:avLst/>
@@ -8099,8 +8099,8 @@
         </p:nvSpPr>
         <p:spPr>
           <a:xfrm>
-            <a:off x="658368" y="4023360"/>
-            <a:ext cx="146304" cy="146304"/>
+            <a:off x="658368" y="3867912"/>
+            <a:ext cx="128016" cy="128016"/>
           </a:xfrm>
           <a:prstGeom prst="rect">
             <a:avLst/>
@@ -8143,8 +8143,8 @@
         </p:nvSpPr>
         <p:spPr>
           <a:xfrm>
-            <a:off x="1042416" y="3840480"/>
-            <a:ext cx="10490911" cy="640080"/>
+            <a:off x="1024128" y="3721608"/>
+            <a:ext cx="10509199" cy="621792"/>
           </a:xfrm>
           <a:prstGeom prst="rect">
             <a:avLst/>
@@ -8185,8 +8185,8 @@
         </p:nvSpPr>
         <p:spPr>
           <a:xfrm>
-            <a:off x="658368" y="4736592"/>
-            <a:ext cx="146304" cy="146304"/>
+            <a:off x="658368" y="4544568"/>
+            <a:ext cx="128016" cy="128016"/>
           </a:xfrm>
           <a:prstGeom prst="rect">
             <a:avLst/>
@@ -8229,8 +8229,8 @@
         </p:nvSpPr>
         <p:spPr>
           <a:xfrm>
-            <a:off x="1042416" y="4553712"/>
-            <a:ext cx="10490911" cy="640080"/>
+            <a:off x="1024128" y="4398264"/>
+            <a:ext cx="10509199" cy="621792"/>
           </a:xfrm>
           <a:prstGeom prst="rect">
             <a:avLst/>
@@ -8271,8 +8271,8 @@
         </p:nvSpPr>
         <p:spPr>
           <a:xfrm>
-            <a:off x="658368" y="5449824"/>
-            <a:ext cx="146304" cy="146304"/>
+            <a:off x="658368" y="5221224"/>
+            <a:ext cx="128016" cy="128016"/>
           </a:xfrm>
           <a:prstGeom prst="rect">
             <a:avLst/>
@@ -8315,8 +8315,8 @@
         </p:nvSpPr>
         <p:spPr>
           <a:xfrm>
-            <a:off x="1042416" y="5266944"/>
-            <a:ext cx="10490911" cy="640080"/>
+            <a:off x="1024128" y="5074920"/>
+            <a:ext cx="10509199" cy="621792"/>
           </a:xfrm>
           <a:prstGeom prst="rect">
             <a:avLst/>
@@ -9287,8 +9287,8 @@
         </p:nvSpPr>
         <p:spPr>
           <a:xfrm>
-            <a:off x="658368" y="1764792"/>
-            <a:ext cx="502920" cy="457200"/>
+            <a:off x="658368" y="1728216"/>
+            <a:ext cx="502920" cy="530352"/>
           </a:xfrm>
           <a:prstGeom prst="rect">
             <a:avLst/>
@@ -9329,8 +9329,8 @@
         </p:nvSpPr>
         <p:spPr>
           <a:xfrm>
-            <a:off x="1344168" y="1783080"/>
-            <a:ext cx="10189159" cy="457200"/>
+            <a:off x="1344168" y="1728216"/>
+            <a:ext cx="10189159" cy="530352"/>
           </a:xfrm>
           <a:prstGeom prst="rect">
             <a:avLst/>
@@ -9371,7 +9371,7 @@
         </p:nvSpPr>
         <p:spPr>
           <a:xfrm>
-            <a:off x="658368" y="2267712"/>
+            <a:off x="658368" y="2276856"/>
             <a:ext cx="10874959" cy="9525"/>
           </a:xfrm>
           <a:prstGeom prst="rect">
@@ -9415,8 +9415,8 @@
         </p:nvSpPr>
         <p:spPr>
           <a:xfrm>
-            <a:off x="658368" y="2368296"/>
-            <a:ext cx="502920" cy="457200"/>
+            <a:off x="658368" y="2331720"/>
+            <a:ext cx="502920" cy="530352"/>
           </a:xfrm>
           <a:prstGeom prst="rect">
             <a:avLst/>
@@ -9457,8 +9457,8 @@
         </p:nvSpPr>
         <p:spPr>
           <a:xfrm>
-            <a:off x="1344168" y="2386584"/>
-            <a:ext cx="10189159" cy="457200"/>
+            <a:off x="1344168" y="2331720"/>
+            <a:ext cx="10189159" cy="530352"/>
           </a:xfrm>
           <a:prstGeom prst="rect">
             <a:avLst/>
@@ -9499,7 +9499,7 @@
         </p:nvSpPr>
         <p:spPr>
           <a:xfrm>
-            <a:off x="658368" y="2871216"/>
+            <a:off x="658368" y="2880360"/>
             <a:ext cx="10874959" cy="9525"/>
           </a:xfrm>
           <a:prstGeom prst="rect">
@@ -9543,8 +9543,8 @@
         </p:nvSpPr>
         <p:spPr>
           <a:xfrm>
-            <a:off x="658368" y="2971800"/>
-            <a:ext cx="502920" cy="457200"/>
+            <a:off x="658368" y="2935224"/>
+            <a:ext cx="502920" cy="530352"/>
           </a:xfrm>
           <a:prstGeom prst="rect">
             <a:avLst/>
@@ -9585,8 +9585,8 @@
         </p:nvSpPr>
         <p:spPr>
           <a:xfrm>
-            <a:off x="1344168" y="2990088"/>
-            <a:ext cx="10189159" cy="457200"/>
+            <a:off x="1344168" y="2935224"/>
+            <a:ext cx="10189159" cy="530352"/>
           </a:xfrm>
           <a:prstGeom prst="rect">
             <a:avLst/>
@@ -9627,7 +9627,7 @@
         </p:nvSpPr>
         <p:spPr>
           <a:xfrm>
-            <a:off x="658368" y="3474720"/>
+            <a:off x="658368" y="3483864"/>
             <a:ext cx="10874959" cy="9525"/>
           </a:xfrm>
           <a:prstGeom prst="rect">
@@ -9671,8 +9671,8 @@
         </p:nvSpPr>
         <p:spPr>
           <a:xfrm>
-            <a:off x="658368" y="3575304"/>
-            <a:ext cx="502920" cy="457200"/>
+            <a:off x="658368" y="3538728"/>
+            <a:ext cx="502920" cy="530352"/>
           </a:xfrm>
           <a:prstGeom prst="rect">
             <a:avLst/>
@@ -9713,8 +9713,8 @@
         </p:nvSpPr>
         <p:spPr>
           <a:xfrm>
-            <a:off x="1344168" y="3593592"/>
-            <a:ext cx="10189159" cy="457200"/>
+            <a:off x="1344168" y="3538728"/>
+            <a:ext cx="10189159" cy="530352"/>
           </a:xfrm>
           <a:prstGeom prst="rect">
             <a:avLst/>
@@ -9755,7 +9755,7 @@
         </p:nvSpPr>
         <p:spPr>
           <a:xfrm>
-            <a:off x="658368" y="4078224"/>
+            <a:off x="658368" y="4087368"/>
             <a:ext cx="10874959" cy="9525"/>
           </a:xfrm>
           <a:prstGeom prst="rect">
@@ -9799,8 +9799,8 @@
         </p:nvSpPr>
         <p:spPr>
           <a:xfrm>
-            <a:off x="658368" y="4178808"/>
-            <a:ext cx="502920" cy="457200"/>
+            <a:off x="658368" y="4142232"/>
+            <a:ext cx="502920" cy="530352"/>
           </a:xfrm>
           <a:prstGeom prst="rect">
             <a:avLst/>
@@ -9841,8 +9841,8 @@
         </p:nvSpPr>
         <p:spPr>
           <a:xfrm>
-            <a:off x="1344168" y="4197096"/>
-            <a:ext cx="10189159" cy="457200"/>
+            <a:off x="1344168" y="4142232"/>
+            <a:ext cx="10189159" cy="530352"/>
           </a:xfrm>
           <a:prstGeom prst="rect">
             <a:avLst/>
@@ -9883,7 +9883,7 @@
         </p:nvSpPr>
         <p:spPr>
           <a:xfrm>
-            <a:off x="658368" y="4681728"/>
+            <a:off x="658368" y="4690872"/>
             <a:ext cx="10874959" cy="9525"/>
           </a:xfrm>
           <a:prstGeom prst="rect">
@@ -9927,8 +9927,8 @@
         </p:nvSpPr>
         <p:spPr>
           <a:xfrm>
-            <a:off x="658368" y="4782312"/>
-            <a:ext cx="502920" cy="457200"/>
+            <a:off x="658368" y="4745736"/>
+            <a:ext cx="502920" cy="530352"/>
           </a:xfrm>
           <a:prstGeom prst="rect">
             <a:avLst/>
@@ -9969,8 +9969,8 @@
         </p:nvSpPr>
         <p:spPr>
           <a:xfrm>
-            <a:off x="1344168" y="4800600"/>
-            <a:ext cx="10189159" cy="457200"/>
+            <a:off x="1344168" y="4745736"/>
+            <a:ext cx="10189159" cy="530352"/>
           </a:xfrm>
           <a:prstGeom prst="rect">
             <a:avLst/>
@@ -10011,7 +10011,7 @@
         </p:nvSpPr>
         <p:spPr>
           <a:xfrm>
-            <a:off x="658368" y="5285232"/>
+            <a:off x="658368" y="5294376"/>
             <a:ext cx="10874959" cy="9525"/>
           </a:xfrm>
           <a:prstGeom prst="rect">
@@ -10055,8 +10055,8 @@
         </p:nvSpPr>
         <p:spPr>
           <a:xfrm>
-            <a:off x="658368" y="5495544"/>
-            <a:ext cx="10874959" cy="457200"/>
+            <a:off x="658368" y="5422392"/>
+            <a:ext cx="10874959" cy="411480"/>
           </a:xfrm>
           <a:prstGeom prst="rect">
             <a:avLst/>
@@ -10078,7 +10078,7 @@
               </a:spcAft>
             </a:pPr>
             <a:r>
-              <a:rPr sz="1400" b="0" i="1">
+              <a:rPr sz="1300" b="0" i="1">
                 <a:solidFill>
                   <a:srgbClr val="5A6375"/>
                 </a:solidFill>
